--- a/assets/figures-editable/c3-c4/c3-e19.pptx
+++ b/assets/figures-editable/c3-c4/c3-e19.pptx
@@ -3104,8 +3104,8 @@
         </p:nvSpPr>
         <p:spPr>
           <a:xfrm>
-            <a:off x="274320" y="137160"/>
-            <a:ext cx="11612880" cy="365760"/>
+            <a:off x="274320" y="118872"/>
+            <a:ext cx="11612880" cy="340105"/>
           </a:xfrm>
           <a:prstGeom prst="rect">
             <a:avLst/>
@@ -3114,7 +3114,7 @@
           <a:effectLst/>
         </p:spPr>
         <p:txBody>
-          <a:bodyPr wrap="square" lIns="27432" rIns="27432" tIns="18288" bIns="18288" anchor="ctr">
+          <a:bodyPr wrap="none" lIns="18288" rIns="18288" tIns="18288" bIns="18288" anchor="t">
             <a:spAutoFit/>
           </a:bodyPr>
           <a:lstStyle/>
@@ -3125,7 +3125,7 @@
               </a:spcAft>
             </a:pPr>
             <a:r>
-              <a:rPr sz="2100" b="0" i="0">
+              <a:rPr sz="1900" b="1" i="0">
                 <a:solidFill>
                   <a:srgbClr val="8EDBD4"/>
                 </a:solidFill>
@@ -3138,22 +3138,465 @@
       </p:sp>
       <p:sp>
         <p:nvSpPr>
-          <p:cNvPr id="3" name="C3-E19 rect 1" descr="sci-ppt:o001"/>
+          <p:cNvPr id="3" name="C3-E19 round_rect 1" descr="sci-ppt:o001"/>
           <p:cNvSpPr/>
           <p:nvPr/>
         </p:nvSpPr>
         <p:spPr>
           <a:xfrm>
-            <a:off x="1920240" y="1463040"/>
-            <a:ext cx="6583680" cy="1005840"/>
+            <a:off x="365760" y="914400"/>
+            <a:ext cx="7040880" cy="4846320"/>
+          </a:xfrm>
+          <a:prstGeom prst="roundRect">
+            <a:avLst/>
+          </a:prstGeom>
+          <a:solidFill>
+            <a:srgbClr val="213E4B"/>
+          </a:solidFill>
+          <a:ln w="20320">
+            <a:solidFill>
+              <a:srgbClr val="8EDBD4"/>
+            </a:solidFill>
+          </a:ln>
+          <a:effectLst/>
+        </p:spPr>
+        <p:txBody>
+          <a:bodyPr rtlCol="0" anchor="ctr"/>
+          <a:lstStyle/>
+          <a:p>
+            <a:pPr algn="ctr"/>
+          </a:p>
+        </p:txBody>
+      </p:sp>
+      <p:sp>
+        <p:nvSpPr>
+          <p:cNvPr id="4" name="C3-E19 text 2" descr="sci-ppt:o002"/>
+          <p:cNvSpPr txBox="1"/>
+          <p:nvPr/>
+        </p:nvSpPr>
+        <p:spPr>
+          <a:xfrm>
+            <a:off x="475488" y="969264"/>
+            <a:ext cx="6821424" cy="254889"/>
           </a:xfrm>
           <a:prstGeom prst="rect">
             <a:avLst/>
           </a:prstGeom>
           <a:noFill/>
-          <a:ln w="19050">
+          <a:effectLst/>
+        </p:spPr>
+        <p:txBody>
+          <a:bodyPr wrap="none" lIns="18288" rIns="18288" tIns="18288" bIns="18288" anchor="t">
+            <a:spAutoFit/>
+          </a:bodyPr>
+          <a:lstStyle/>
+          <a:p>
+            <a:pPr algn="l">
+              <a:spcAft>
+                <a:spcPts val="0"/>
+              </a:spcAft>
+            </a:pPr>
+            <a:r>
+              <a:rPr sz="1350" b="1" i="0">
+                <a:solidFill>
+                  <a:srgbClr val="8EDBD4"/>
+                </a:solidFill>
+                <a:latin typeface="Arial"/>
+              </a:rPr>
+              <a:t>Slender jet: a(z, t) stretched by v(z, t)</a:t>
+            </a:r>
+          </a:p>
+        </p:txBody>
+      </p:sp>
+      <p:sp>
+        <p:nvSpPr>
+          <p:cNvPr id="5" name="C3-E19 polygon 3" descr="sci-ppt:o003"/>
+          <p:cNvSpPr/>
+          <p:nvPr/>
+        </p:nvSpPr>
+        <p:spPr>
+          <a:xfrm>
+            <a:off x="822960" y="2553804"/>
+            <a:ext cx="6035040" cy="1476071"/>
+          </a:xfrm>
+          <a:custGeom>
+            <a:avLst/>
+            <a:gdLst/>
+            <a:ahLst/>
+            <a:cxnLst/>
+            <a:rect l="l" t="t" r="r" b="b"/>
+            <a:pathLst>
+              <a:path w="6035040" h="1476071">
+                <a:moveTo>
+                  <a:pt x="0" y="0"/>
+                </a:moveTo>
+                <a:lnTo>
+                  <a:pt x="102288" y="9274"/>
+                </a:lnTo>
+                <a:lnTo>
+                  <a:pt x="204577" y="19875"/>
+                </a:lnTo>
+                <a:lnTo>
+                  <a:pt x="306866" y="31819"/>
+                </a:lnTo>
+                <a:lnTo>
+                  <a:pt x="409155" y="45089"/>
+                </a:lnTo>
+                <a:lnTo>
+                  <a:pt x="511444" y="59635"/>
+                </a:lnTo>
+                <a:lnTo>
+                  <a:pt x="613732" y="75378"/>
+                </a:lnTo>
+                <a:lnTo>
+                  <a:pt x="716021" y="92206"/>
+                </a:lnTo>
+                <a:lnTo>
+                  <a:pt x="818310" y="109984"/>
+                </a:lnTo>
+                <a:lnTo>
+                  <a:pt x="920599" y="128552"/>
+                </a:lnTo>
+                <a:lnTo>
+                  <a:pt x="1022888" y="147730"/>
+                </a:lnTo>
+                <a:lnTo>
+                  <a:pt x="1125176" y="167325"/>
+                </a:lnTo>
+                <a:lnTo>
+                  <a:pt x="1227465" y="187132"/>
+                </a:lnTo>
+                <a:lnTo>
+                  <a:pt x="1329754" y="206943"/>
+                </a:lnTo>
+                <a:lnTo>
+                  <a:pt x="1432043" y="226547"/>
+                </a:lnTo>
+                <a:lnTo>
+                  <a:pt x="1534332" y="245740"/>
+                </a:lnTo>
+                <a:lnTo>
+                  <a:pt x="1636621" y="264328"/>
+                </a:lnTo>
+                <a:lnTo>
+                  <a:pt x="1738909" y="282131"/>
+                </a:lnTo>
+                <a:lnTo>
+                  <a:pt x="1841198" y="298989"/>
+                </a:lnTo>
+                <a:lnTo>
+                  <a:pt x="1943487" y="314764"/>
+                </a:lnTo>
+                <a:lnTo>
+                  <a:pt x="2045776" y="329347"/>
+                </a:lnTo>
+                <a:lnTo>
+                  <a:pt x="2148065" y="342654"/>
+                </a:lnTo>
+                <a:lnTo>
+                  <a:pt x="2250353" y="354637"/>
+                </a:lnTo>
+                <a:lnTo>
+                  <a:pt x="2352642" y="365277"/>
+                </a:lnTo>
+                <a:lnTo>
+                  <a:pt x="2454931" y="374589"/>
+                </a:lnTo>
+                <a:lnTo>
+                  <a:pt x="2557220" y="382621"/>
+                </a:lnTo>
+                <a:lnTo>
+                  <a:pt x="2659509" y="389451"/>
+                </a:lnTo>
+                <a:lnTo>
+                  <a:pt x="2761797" y="395188"/>
+                </a:lnTo>
+                <a:lnTo>
+                  <a:pt x="2864086" y="399966"/>
+                </a:lnTo>
+                <a:lnTo>
+                  <a:pt x="2966375" y="403944"/>
+                </a:lnTo>
+                <a:lnTo>
+                  <a:pt x="3068664" y="407301"/>
+                </a:lnTo>
+                <a:lnTo>
+                  <a:pt x="3170953" y="410229"/>
+                </a:lnTo>
+                <a:lnTo>
+                  <a:pt x="3273242" y="412932"/>
+                </a:lnTo>
+                <a:lnTo>
+                  <a:pt x="3375530" y="415619"/>
+                </a:lnTo>
+                <a:lnTo>
+                  <a:pt x="3477819" y="418500"/>
+                </a:lnTo>
+                <a:lnTo>
+                  <a:pt x="3580108" y="421781"/>
+                </a:lnTo>
+                <a:lnTo>
+                  <a:pt x="3682397" y="425655"/>
+                </a:lnTo>
+                <a:lnTo>
+                  <a:pt x="3784686" y="430303"/>
+                </a:lnTo>
+                <a:lnTo>
+                  <a:pt x="3886974" y="435888"/>
+                </a:lnTo>
+                <a:lnTo>
+                  <a:pt x="3989263" y="442548"/>
+                </a:lnTo>
+                <a:lnTo>
+                  <a:pt x="4091552" y="450395"/>
+                </a:lnTo>
+                <a:lnTo>
+                  <a:pt x="4193841" y="459513"/>
+                </a:lnTo>
+                <a:lnTo>
+                  <a:pt x="4296130" y="469953"/>
+                </a:lnTo>
+                <a:lnTo>
+                  <a:pt x="4398418" y="481736"/>
+                </a:lnTo>
+                <a:lnTo>
+                  <a:pt x="4500707" y="494849"/>
+                </a:lnTo>
+                <a:lnTo>
+                  <a:pt x="4602996" y="509246"/>
+                </a:lnTo>
+                <a:lnTo>
+                  <a:pt x="4705285" y="524850"/>
+                </a:lnTo>
+                <a:lnTo>
+                  <a:pt x="4807574" y="541555"/>
+                </a:lnTo>
+                <a:lnTo>
+                  <a:pt x="4909863" y="559227"/>
+                </a:lnTo>
+                <a:lnTo>
+                  <a:pt x="5012151" y="577709"/>
+                </a:lnTo>
+                <a:lnTo>
+                  <a:pt x="5114440" y="596824"/>
+                </a:lnTo>
+                <a:lnTo>
+                  <a:pt x="5216729" y="616380"/>
+                </a:lnTo>
+                <a:lnTo>
+                  <a:pt x="5319018" y="636173"/>
+                </a:lnTo>
+                <a:lnTo>
+                  <a:pt x="5421307" y="655994"/>
+                </a:lnTo>
+                <a:lnTo>
+                  <a:pt x="5523595" y="675634"/>
+                </a:lnTo>
+                <a:lnTo>
+                  <a:pt x="5625884" y="694887"/>
+                </a:lnTo>
+                <a:lnTo>
+                  <a:pt x="5728173" y="713557"/>
+                </a:lnTo>
+                <a:lnTo>
+                  <a:pt x="5830462" y="731463"/>
+                </a:lnTo>
+                <a:lnTo>
+                  <a:pt x="5932751" y="748442"/>
+                </a:lnTo>
+                <a:lnTo>
+                  <a:pt x="6035040" y="764354"/>
+                </a:lnTo>
+                <a:lnTo>
+                  <a:pt x="6035040" y="711717"/>
+                </a:lnTo>
+                <a:lnTo>
+                  <a:pt x="5932751" y="727629"/>
+                </a:lnTo>
+                <a:lnTo>
+                  <a:pt x="5830462" y="744608"/>
+                </a:lnTo>
+                <a:lnTo>
+                  <a:pt x="5728173" y="762514"/>
+                </a:lnTo>
+                <a:lnTo>
+                  <a:pt x="5625884" y="781184"/>
+                </a:lnTo>
+                <a:lnTo>
+                  <a:pt x="5523595" y="800437"/>
+                </a:lnTo>
+                <a:lnTo>
+                  <a:pt x="5421307" y="820077"/>
+                </a:lnTo>
+                <a:lnTo>
+                  <a:pt x="5319018" y="839898"/>
+                </a:lnTo>
+                <a:lnTo>
+                  <a:pt x="5216729" y="859691"/>
+                </a:lnTo>
+                <a:lnTo>
+                  <a:pt x="5114440" y="879247"/>
+                </a:lnTo>
+                <a:lnTo>
+                  <a:pt x="5012151" y="898362"/>
+                </a:lnTo>
+                <a:lnTo>
+                  <a:pt x="4909863" y="916844"/>
+                </a:lnTo>
+                <a:lnTo>
+                  <a:pt x="4807574" y="934516"/>
+                </a:lnTo>
+                <a:lnTo>
+                  <a:pt x="4705285" y="951221"/>
+                </a:lnTo>
+                <a:lnTo>
+                  <a:pt x="4602996" y="966825"/>
+                </a:lnTo>
+                <a:lnTo>
+                  <a:pt x="4500707" y="981222"/>
+                </a:lnTo>
+                <a:lnTo>
+                  <a:pt x="4398418" y="994335"/>
+                </a:lnTo>
+                <a:lnTo>
+                  <a:pt x="4296130" y="1006118"/>
+                </a:lnTo>
+                <a:lnTo>
+                  <a:pt x="4193841" y="1016558"/>
+                </a:lnTo>
+                <a:lnTo>
+                  <a:pt x="4091552" y="1025676"/>
+                </a:lnTo>
+                <a:lnTo>
+                  <a:pt x="3989263" y="1033523"/>
+                </a:lnTo>
+                <a:lnTo>
+                  <a:pt x="3886974" y="1040183"/>
+                </a:lnTo>
+                <a:lnTo>
+                  <a:pt x="3784686" y="1045768"/>
+                </a:lnTo>
+                <a:lnTo>
+                  <a:pt x="3682397" y="1050416"/>
+                </a:lnTo>
+                <a:lnTo>
+                  <a:pt x="3580108" y="1054290"/>
+                </a:lnTo>
+                <a:lnTo>
+                  <a:pt x="3477819" y="1057571"/>
+                </a:lnTo>
+                <a:lnTo>
+                  <a:pt x="3375530" y="1060452"/>
+                </a:lnTo>
+                <a:lnTo>
+                  <a:pt x="3273242" y="1063139"/>
+                </a:lnTo>
+                <a:lnTo>
+                  <a:pt x="3170953" y="1065842"/>
+                </a:lnTo>
+                <a:lnTo>
+                  <a:pt x="3068664" y="1068770"/>
+                </a:lnTo>
+                <a:lnTo>
+                  <a:pt x="2966375" y="1072127"/>
+                </a:lnTo>
+                <a:lnTo>
+                  <a:pt x="2864086" y="1076105"/>
+                </a:lnTo>
+                <a:lnTo>
+                  <a:pt x="2761797" y="1080883"/>
+                </a:lnTo>
+                <a:lnTo>
+                  <a:pt x="2659509" y="1086620"/>
+                </a:lnTo>
+                <a:lnTo>
+                  <a:pt x="2557220" y="1093450"/>
+                </a:lnTo>
+                <a:lnTo>
+                  <a:pt x="2454931" y="1101482"/>
+                </a:lnTo>
+                <a:lnTo>
+                  <a:pt x="2352642" y="1110794"/>
+                </a:lnTo>
+                <a:lnTo>
+                  <a:pt x="2250353" y="1121434"/>
+                </a:lnTo>
+                <a:lnTo>
+                  <a:pt x="2148065" y="1133417"/>
+                </a:lnTo>
+                <a:lnTo>
+                  <a:pt x="2045776" y="1146724"/>
+                </a:lnTo>
+                <a:lnTo>
+                  <a:pt x="1943487" y="1161307"/>
+                </a:lnTo>
+                <a:lnTo>
+                  <a:pt x="1841198" y="1177082"/>
+                </a:lnTo>
+                <a:lnTo>
+                  <a:pt x="1738909" y="1193940"/>
+                </a:lnTo>
+                <a:lnTo>
+                  <a:pt x="1636621" y="1211743"/>
+                </a:lnTo>
+                <a:lnTo>
+                  <a:pt x="1534332" y="1230331"/>
+                </a:lnTo>
+                <a:lnTo>
+                  <a:pt x="1432043" y="1249524"/>
+                </a:lnTo>
+                <a:lnTo>
+                  <a:pt x="1329754" y="1269128"/>
+                </a:lnTo>
+                <a:lnTo>
+                  <a:pt x="1227465" y="1288939"/>
+                </a:lnTo>
+                <a:lnTo>
+                  <a:pt x="1125176" y="1308746"/>
+                </a:lnTo>
+                <a:lnTo>
+                  <a:pt x="1022888" y="1328341"/>
+                </a:lnTo>
+                <a:lnTo>
+                  <a:pt x="920599" y="1347519"/>
+                </a:lnTo>
+                <a:lnTo>
+                  <a:pt x="818310" y="1366087"/>
+                </a:lnTo>
+                <a:lnTo>
+                  <a:pt x="716021" y="1383865"/>
+                </a:lnTo>
+                <a:lnTo>
+                  <a:pt x="613732" y="1400693"/>
+                </a:lnTo>
+                <a:lnTo>
+                  <a:pt x="511444" y="1416436"/>
+                </a:lnTo>
+                <a:lnTo>
+                  <a:pt x="409155" y="1430982"/>
+                </a:lnTo>
+                <a:lnTo>
+                  <a:pt x="306866" y="1444252"/>
+                </a:lnTo>
+                <a:lnTo>
+                  <a:pt x="204577" y="1456196"/>
+                </a:lnTo>
+                <a:lnTo>
+                  <a:pt x="102288" y="1466797"/>
+                </a:lnTo>
+                <a:lnTo>
+                  <a:pt x="0" y="1476071"/>
+                </a:lnTo>
+                <a:close/>
+              </a:path>
+            </a:pathLst>
+          </a:custGeom>
+          <a:solidFill>
+            <a:srgbClr val="1E4A5A"/>
+          </a:solidFill>
+          <a:ln w="27940">
             <a:solidFill>
-              <a:srgbClr val="B4C7D2"/>
+              <a:srgbClr val="8EDBD4"/>
             </a:solidFill>
           </a:ln>
           <a:effectLst/>
@@ -3168,19 +3611,225 @@
       </p:sp>
       <p:cxnSp>
         <p:nvCxnSpPr>
-          <p:cNvPr id="4" name="C3-E19 arrow 2" descr="sci-ppt:o002"/>
+          <p:cNvPr id="6" name="C3-E19 arrow 4" descr="sci-ppt:o004"/>
           <p:cNvCxnSpPr/>
           <p:nvPr/>
         </p:nvCxnSpPr>
         <p:spPr>
           <a:xfrm>
-            <a:off x="731520" y="1965960"/>
-            <a:ext cx="2468880" cy="0"/>
+            <a:off x="1463040" y="3291840"/>
+            <a:ext cx="320040" cy="0"/>
           </a:xfrm>
           <a:prstGeom prst="line">
             <a:avLst/>
           </a:prstGeom>
-          <a:ln w="25400">
+          <a:ln w="38100">
+            <a:solidFill>
+              <a:srgbClr val="F2B880"/>
+            </a:solidFill>
+            <a:headEnd type="none" w="med" len="med"/>
+            <a:tailEnd type="triangle" w="med" len="med"/>
+          </a:ln>
+          <a:effectLst/>
+        </p:spPr>
+      </p:cxnSp>
+      <p:cxnSp>
+        <p:nvCxnSpPr>
+          <p:cNvPr id="7" name="C3-E19 arrow 5" descr="sci-ppt:o005"/>
+          <p:cNvCxnSpPr/>
+          <p:nvPr/>
+        </p:nvCxnSpPr>
+        <p:spPr>
+          <a:xfrm>
+            <a:off x="2926080" y="3291840"/>
+            <a:ext cx="612648" cy="0"/>
+          </a:xfrm>
+          <a:prstGeom prst="line">
+            <a:avLst/>
+          </a:prstGeom>
+          <a:ln w="38100">
+            <a:solidFill>
+              <a:srgbClr val="F2B880"/>
+            </a:solidFill>
+            <a:headEnd type="none" w="med" len="med"/>
+            <a:tailEnd type="triangle" w="med" len="med"/>
+          </a:ln>
+          <a:effectLst/>
+        </p:spPr>
+      </p:cxnSp>
+      <p:cxnSp>
+        <p:nvCxnSpPr>
+          <p:cNvPr id="8" name="C3-E19 arrow 6" descr="sci-ppt:o006"/>
+          <p:cNvCxnSpPr/>
+          <p:nvPr/>
+        </p:nvCxnSpPr>
+        <p:spPr>
+          <a:xfrm>
+            <a:off x="4389120" y="3291840"/>
+            <a:ext cx="905256" cy="0"/>
+          </a:xfrm>
+          <a:prstGeom prst="line">
+            <a:avLst/>
+          </a:prstGeom>
+          <a:ln w="38100">
+            <a:solidFill>
+              <a:srgbClr val="F2B880"/>
+            </a:solidFill>
+            <a:headEnd type="none" w="med" len="med"/>
+            <a:tailEnd type="triangle" w="med" len="med"/>
+          </a:ln>
+          <a:effectLst/>
+        </p:spPr>
+      </p:cxnSp>
+      <p:cxnSp>
+        <p:nvCxnSpPr>
+          <p:cNvPr id="9" name="C3-E19 arrow 7" descr="sci-ppt:o007"/>
+          <p:cNvCxnSpPr/>
+          <p:nvPr/>
+        </p:nvCxnSpPr>
+        <p:spPr>
+          <a:xfrm>
+            <a:off x="5852160" y="3291840"/>
+            <a:ext cx="1197864" cy="0"/>
+          </a:xfrm>
+          <a:prstGeom prst="line">
+            <a:avLst/>
+          </a:prstGeom>
+          <a:ln w="38100">
+            <a:solidFill>
+              <a:srgbClr val="F2B880"/>
+            </a:solidFill>
+            <a:headEnd type="none" w="med" len="med"/>
+            <a:tailEnd type="triangle" w="med" len="med"/>
+          </a:ln>
+          <a:effectLst/>
+        </p:spPr>
+      </p:cxnSp>
+      <p:sp>
+        <p:nvSpPr>
+          <p:cNvPr id="10" name="C3-E19 text 8" descr="sci-ppt:o008"/>
+          <p:cNvSpPr txBox="1"/>
+          <p:nvPr/>
+        </p:nvSpPr>
+        <p:spPr>
+          <a:xfrm>
+            <a:off x="914400" y="4251960"/>
+            <a:ext cx="6309360" cy="231648"/>
+          </a:xfrm>
+          <a:prstGeom prst="rect">
+            <a:avLst/>
+          </a:prstGeom>
+          <a:noFill/>
+          <a:effectLst/>
+        </p:spPr>
+        <p:txBody>
+          <a:bodyPr wrap="none" lIns="18288" rIns="18288" tIns="18288" bIns="18288" anchor="t">
+            <a:spAutoFit/>
+          </a:bodyPr>
+          <a:lstStyle/>
+          <a:p>
+            <a:pPr algn="l">
+              <a:spcAft>
+                <a:spcPts val="0"/>
+              </a:spcAft>
+            </a:pPr>
+            <a:r>
+              <a:rPr sz="1200" b="1" i="0">
+                <a:solidFill>
+                  <a:srgbClr val="F2B880"/>
+                </a:solidFill>
+                <a:latin typeface="Arial"/>
+              </a:rPr>
+              <a:t>v(z): speed grows along z, so the column is stretched and thins</a:t>
+            </a:r>
+          </a:p>
+        </p:txBody>
+      </p:sp>
+      <p:sp>
+        <p:nvSpPr>
+          <p:cNvPr id="11" name="C3-E19 rect 9" descr="sci-ppt:o009"/>
+          <p:cNvSpPr/>
+          <p:nvPr/>
+        </p:nvSpPr>
+        <p:spPr>
+          <a:xfrm>
+            <a:off x="2743200" y="1828800"/>
+            <a:ext cx="1097280" cy="2926080"/>
+          </a:xfrm>
+          <a:prstGeom prst="rect">
+            <a:avLst/>
+          </a:prstGeom>
+          <a:noFill/>
+          <a:ln w="22860">
+            <a:solidFill>
+              <a:srgbClr val="F28BA0"/>
+            </a:solidFill>
+          </a:ln>
+          <a:effectLst/>
+        </p:spPr>
+        <p:txBody>
+          <a:bodyPr rtlCol="0" anchor="ctr"/>
+          <a:lstStyle/>
+          <a:p>
+            <a:pPr algn="ctr"/>
+          </a:p>
+        </p:txBody>
+      </p:sp>
+      <p:sp>
+        <p:nvSpPr>
+          <p:cNvPr id="12" name="C3-E19 text 10" descr="sci-ppt:o010"/>
+          <p:cNvSpPr txBox="1"/>
+          <p:nvPr/>
+        </p:nvSpPr>
+        <p:spPr>
+          <a:xfrm>
+            <a:off x="2468880" y="1417320"/>
+            <a:ext cx="1828800" cy="231648"/>
+          </a:xfrm>
+          <a:prstGeom prst="rect">
+            <a:avLst/>
+          </a:prstGeom>
+          <a:noFill/>
+          <a:effectLst/>
+        </p:spPr>
+        <p:txBody>
+          <a:bodyPr wrap="none" lIns="18288" rIns="18288" tIns="18288" bIns="18288" anchor="t">
+            <a:spAutoFit/>
+          </a:bodyPr>
+          <a:lstStyle/>
+          <a:p>
+            <a:pPr algn="l">
+              <a:spcAft>
+                <a:spcPts val="0"/>
+              </a:spcAft>
+            </a:pPr>
+            <a:r>
+              <a:rPr sz="1200" b="1" i="0">
+                <a:solidFill>
+                  <a:srgbClr val="F28BA0"/>
+                </a:solidFill>
+                <a:latin typeface="Arial"/>
+              </a:rPr>
+              <a:t>slice Δz</a:t>
+            </a:r>
+          </a:p>
+        </p:txBody>
+      </p:sp>
+      <p:cxnSp>
+        <p:nvCxnSpPr>
+          <p:cNvPr id="13" name="C3-E19 arrow 11" descr="sci-ppt:o011"/>
+          <p:cNvCxnSpPr/>
+          <p:nvPr/>
+        </p:nvCxnSpPr>
+        <p:spPr>
+          <a:xfrm>
+            <a:off x="2331720" y="2377440"/>
+            <a:ext cx="365760" cy="0"/>
+          </a:xfrm>
+          <a:prstGeom prst="line">
+            <a:avLst/>
+          </a:prstGeom>
+          <a:ln w="30480">
             <a:solidFill>
               <a:srgbClr val="8EDBD4"/>
             </a:solidFill>
@@ -3192,19 +3841,19 @@
       </p:cxnSp>
       <p:cxnSp>
         <p:nvCxnSpPr>
-          <p:cNvPr id="5" name="C3-E19 arrow 3" descr="sci-ppt:o003"/>
+          <p:cNvPr id="14" name="C3-E19 arrow 12" descr="sci-ppt:o012"/>
           <p:cNvCxnSpPr/>
           <p:nvPr/>
         </p:nvCxnSpPr>
         <p:spPr>
           <a:xfrm>
-            <a:off x="7132320" y="1965960"/>
-            <a:ext cx="3749040" cy="0"/>
+            <a:off x="3886200" y="2377440"/>
+            <a:ext cx="365760" cy="0"/>
           </a:xfrm>
           <a:prstGeom prst="line">
             <a:avLst/>
           </a:prstGeom>
-          <a:ln w="25400">
+          <a:ln w="30480">
             <a:solidFill>
               <a:srgbClr val="8EDBD4"/>
             </a:solidFill>
@@ -3216,14 +3865,14 @@
       </p:cxnSp>
       <p:sp>
         <p:nvSpPr>
-          <p:cNvPr id="6" name="C3-E19 text 4" descr="sci-ppt:o004"/>
+          <p:cNvPr id="15" name="C3-E19 text 13" descr="sci-ppt:o013"/>
           <p:cNvSpPr txBox="1"/>
           <p:nvPr/>
         </p:nvSpPr>
         <p:spPr>
           <a:xfrm>
-            <a:off x="548640" y="2606040"/>
-            <a:ext cx="3657600" cy="457200"/>
+            <a:off x="914400" y="4937760"/>
+            <a:ext cx="2743200" cy="231648"/>
           </a:xfrm>
           <a:prstGeom prst="rect">
             <a:avLst/>
@@ -3232,7 +3881,7 @@
           <a:effectLst/>
         </p:spPr>
         <p:txBody>
-          <a:bodyPr wrap="square" lIns="27432" rIns="27432" tIns="18288" bIns="18288" anchor="ctr">
+          <a:bodyPr wrap="none" lIns="18288" rIns="18288" tIns="18288" bIns="18288" anchor="t">
             <a:spAutoFit/>
           </a:bodyPr>
           <a:lstStyle/>
@@ -3243,27 +3892,27 @@
               </a:spcAft>
             </a:pPr>
             <a:r>
-              <a:rPr sz="1800" b="0" i="0">
+              <a:rPr sz="1200" b="1" i="0">
                 <a:solidFill>
-                  <a:srgbClr val="E7F0F3"/>
+                  <a:srgbClr val="8EDBD4"/>
                 </a:solidFill>
                 <a:latin typeface="Arial"/>
               </a:rPr>
-              <a:t>Incoming flux A v |z</a:t>
-            </a:r>
-          </a:p>
-        </p:txBody>
-      </p:sp>
-      <p:sp>
-        <p:nvSpPr>
-          <p:cNvPr id="7" name="C3-E19 text 5" descr="sci-ppt:o005"/>
+              <a:t>[Av](z)</a:t>
+            </a:r>
+          </a:p>
+        </p:txBody>
+      </p:sp>
+      <p:sp>
+        <p:nvSpPr>
+          <p:cNvPr id="16" name="C3-E19 text 14" descr="sci-ppt:o014"/>
           <p:cNvSpPr txBox="1"/>
           <p:nvPr/>
         </p:nvSpPr>
         <p:spPr>
           <a:xfrm>
-            <a:off x="7406640" y="2606040"/>
-            <a:ext cx="4114800" cy="457200"/>
+            <a:off x="4206240" y="4937760"/>
+            <a:ext cx="2743200" cy="231648"/>
           </a:xfrm>
           <a:prstGeom prst="rect">
             <a:avLst/>
@@ -3272,7 +3921,7 @@
           <a:effectLst/>
         </p:spPr>
         <p:txBody>
-          <a:bodyPr wrap="square" lIns="27432" rIns="27432" tIns="18288" bIns="18288" anchor="ctr">
+          <a:bodyPr wrap="none" lIns="18288" rIns="18288" tIns="18288" bIns="18288" anchor="t">
             <a:spAutoFit/>
           </a:bodyPr>
           <a:lstStyle/>
@@ -3283,27 +3932,59 @@
               </a:spcAft>
             </a:pPr>
             <a:r>
-              <a:rPr sz="1800" b="0" i="0">
+              <a:rPr sz="1200" b="1" i="0">
                 <a:solidFill>
-                  <a:srgbClr val="E7F0F3"/>
+                  <a:srgbClr val="8EDBD4"/>
                 </a:solidFill>
                 <a:latin typeface="Arial"/>
               </a:rPr>
-              <a:t>Outgoing flux A v |z+Δz</a:t>
-            </a:r>
-          </a:p>
-        </p:txBody>
-      </p:sp>
-      <p:sp>
-        <p:nvSpPr>
-          <p:cNvPr id="8" name="C3-E19 text 6" descr="sci-ppt:o006"/>
+              <a:t>[Av](z + Δz)</a:t>
+            </a:r>
+          </a:p>
+        </p:txBody>
+      </p:sp>
+      <p:sp>
+        <p:nvSpPr>
+          <p:cNvPr id="17" name="C3-E19 round_rect 15" descr="sci-ppt:o015"/>
+          <p:cNvSpPr/>
+          <p:nvPr/>
+        </p:nvSpPr>
+        <p:spPr>
+          <a:xfrm>
+            <a:off x="7589520" y="914400"/>
+            <a:ext cx="4251960" cy="4846320"/>
+          </a:xfrm>
+          <a:prstGeom prst="roundRect">
+            <a:avLst/>
+          </a:prstGeom>
+          <a:solidFill>
+            <a:srgbClr val="213E4B"/>
+          </a:solidFill>
+          <a:ln w="20320">
+            <a:solidFill>
+              <a:srgbClr val="8EDBD4"/>
+            </a:solidFill>
+          </a:ln>
+          <a:effectLst/>
+        </p:spPr>
+        <p:txBody>
+          <a:bodyPr rtlCol="0" anchor="ctr"/>
+          <a:lstStyle/>
+          <a:p>
+            <a:pPr algn="ctr"/>
+          </a:p>
+        </p:txBody>
+      </p:sp>
+      <p:sp>
+        <p:nvSpPr>
+          <p:cNvPr id="18" name="C3-E19 text 16" descr="sci-ppt:o016"/>
           <p:cNvSpPr txBox="1"/>
           <p:nvPr/>
         </p:nvSpPr>
         <p:spPr>
           <a:xfrm>
-            <a:off x="3840480" y="1645920"/>
-            <a:ext cx="3657600" cy="548640"/>
+            <a:off x="7699248" y="969264"/>
+            <a:ext cx="4032504" cy="247142"/>
           </a:xfrm>
           <a:prstGeom prst="rect">
             <a:avLst/>
@@ -3312,7 +3993,7 @@
           <a:effectLst/>
         </p:spPr>
         <p:txBody>
-          <a:bodyPr wrap="square" lIns="27432" rIns="27432" tIns="18288" bIns="18288" anchor="ctr">
+          <a:bodyPr wrap="none" lIns="18288" rIns="18288" tIns="18288" bIns="18288" anchor="t">
             <a:spAutoFit/>
           </a:bodyPr>
           <a:lstStyle/>
@@ -3323,43 +4004,27 @@
               </a:spcAft>
             </a:pPr>
             <a:r>
-              <a:rPr sz="1800" b="0" i="0">
+              <a:rPr sz="1300" b="1" i="0">
                 <a:solidFill>
-                  <a:srgbClr val="E7F0F3"/>
+                  <a:srgbClr val="8EDBD4"/>
                 </a:solidFill>
                 <a:latin typeface="Arial"/>
               </a:rPr>
-              <a:t>Fixed axial slice Δz</a:t>
-            </a:r>
-          </a:p>
-          <a:p>
-            <a:pPr algn="l">
-              <a:spcAft>
-                <a:spcPts val="0"/>
-              </a:spcAft>
-            </a:pPr>
-            <a:r>
-              <a:rPr sz="1800" b="0" i="0">
-                <a:solidFill>
-                  <a:srgbClr val="E7F0F3"/>
-                </a:solidFill>
-                <a:latin typeface="Arial"/>
-              </a:rPr>
-              <a:t>A(z,t) = πa²</a:t>
-            </a:r>
-          </a:p>
-        </p:txBody>
-      </p:sp>
-      <p:sp>
-        <p:nvSpPr>
-          <p:cNvPr id="9" name="C3-E19 text 7" descr="sci-ppt:o007"/>
+              <a:t>Volume balance of the slice</a:t>
+            </a:r>
+          </a:p>
+        </p:txBody>
+      </p:sp>
+      <p:sp>
+        <p:nvSpPr>
+          <p:cNvPr id="19" name="C3-E19 text 17" descr="sci-ppt:o017"/>
           <p:cNvSpPr txBox="1"/>
           <p:nvPr/>
         </p:nvSpPr>
         <p:spPr>
           <a:xfrm>
-            <a:off x="731520" y="777240"/>
-            <a:ext cx="10972800" cy="365760"/>
+            <a:off x="7726679" y="1417320"/>
+            <a:ext cx="4023360" cy="231648"/>
           </a:xfrm>
           <a:prstGeom prst="rect">
             <a:avLst/>
@@ -3368,7 +4033,7 @@
           <a:effectLst/>
         </p:spPr>
         <p:txBody>
-          <a:bodyPr wrap="square" lIns="27432" rIns="27432" tIns="18288" bIns="18288" anchor="ctr">
+          <a:bodyPr wrap="none" lIns="18288" rIns="18288" tIns="18288" bIns="18288" anchor="t">
             <a:spAutoFit/>
           </a:bodyPr>
           <a:lstStyle/>
@@ -3379,27 +4044,27 @@
               </a:spcAft>
             </a:pPr>
             <a:r>
-              <a:rPr sz="1900" b="0" i="0">
+              <a:rPr sz="1200" b="1" i="0">
                 <a:solidFill>
-                  <a:srgbClr val="8EDBD4"/>
+                  <a:srgbClr val="E7F0F3"/>
                 </a:solidFill>
                 <a:latin typeface="Arial"/>
               </a:rPr>
-              <a:t>Slender liquid: axial velocity v(z,t); radius a(z,t)</a:t>
-            </a:r>
-          </a:p>
-        </p:txBody>
-      </p:sp>
-      <p:sp>
-        <p:nvSpPr>
-          <p:cNvPr id="10" name="C3-E19 text 8" descr="sci-ppt:o008"/>
+              <a:t>A = πa²;  ∂ₜ∫A dξ = [Av](z) − [Av](z + Δz)</a:t>
+            </a:r>
+          </a:p>
+        </p:txBody>
+      </p:sp>
+      <p:sp>
+        <p:nvSpPr>
+          <p:cNvPr id="20" name="C3-E19 text 18" descr="sci-ppt:o018"/>
           <p:cNvSpPr txBox="1"/>
           <p:nvPr/>
         </p:nvSpPr>
         <p:spPr>
           <a:xfrm>
-            <a:off x="914400" y="3337560"/>
-            <a:ext cx="10607040" cy="365760"/>
+            <a:off x="7726679" y="2148840"/>
+            <a:ext cx="4023360" cy="247142"/>
           </a:xfrm>
           <a:prstGeom prst="rect">
             <a:avLst/>
@@ -3408,7 +4073,7 @@
           <a:effectLst/>
         </p:spPr>
         <p:txBody>
-          <a:bodyPr wrap="square" lIns="27432" rIns="27432" tIns="18288" bIns="18288" anchor="ctr">
+          <a:bodyPr wrap="none" lIns="18288" rIns="18288" tIns="18288" bIns="18288" anchor="t">
             <a:spAutoFit/>
           </a:bodyPr>
           <a:lstStyle/>
@@ -3419,49 +4084,27 @@
               </a:spcAft>
             </a:pPr>
             <a:r>
-              <a:rPr sz="1800" b="0" i="0">
+              <a:rPr sz="1300" b="1" i="0">
                 <a:solidFill>
-                  <a:srgbClr val="E7F0F3"/>
+                  <a:srgbClr val="F2B880"/>
                 </a:solidFill>
                 <a:latin typeface="Arial"/>
               </a:rPr>
-              <a:t>Storage changes by incoming minus outgoing volume flux.</a:t>
-            </a:r>
-          </a:p>
-        </p:txBody>
-      </p:sp>
-      <p:cxnSp>
-        <p:nvCxnSpPr>
-          <p:cNvPr id="11" name="C3-E19 line 9" descr="sci-ppt:o009"/>
-          <p:cNvCxnSpPr/>
+              <a:t>Δz → 0:  ∂ₜA + ∂_z(Av) = 0</a:t>
+            </a:r>
+          </a:p>
+        </p:txBody>
+      </p:sp>
+      <p:sp>
+        <p:nvSpPr>
+          <p:cNvPr id="21" name="C3-E19 text 19" descr="sci-ppt:o019"/>
+          <p:cNvSpPr txBox="1"/>
           <p:nvPr/>
-        </p:nvCxnSpPr>
+        </p:nvSpPr>
         <p:spPr>
           <a:xfrm>
-            <a:off x="274320" y="3977639"/>
-            <a:ext cx="11612880" cy="0"/>
-          </a:xfrm>
-          <a:prstGeom prst="line">
-            <a:avLst/>
-          </a:prstGeom>
-          <a:ln w="12700">
-            <a:solidFill>
-              <a:srgbClr val="405967"/>
-            </a:solidFill>
-          </a:ln>
-          <a:effectLst/>
-        </p:spPr>
-      </p:cxnSp>
-      <p:sp>
-        <p:nvSpPr>
-          <p:cNvPr id="12" name="C3-E19 text 10" descr="sci-ppt:o010"/>
-          <p:cNvSpPr txBox="1"/>
-          <p:nvPr/>
-        </p:nvSpPr>
-        <p:spPr>
-          <a:xfrm>
-            <a:off x="320040" y="4096512"/>
-            <a:ext cx="5715000" cy="246888"/>
+            <a:off x="7726679" y="2743200"/>
+            <a:ext cx="4023360" cy="223900"/>
           </a:xfrm>
           <a:prstGeom prst="rect">
             <a:avLst/>
@@ -3470,7 +4113,7 @@
           <a:effectLst/>
         </p:spPr>
         <p:txBody>
-          <a:bodyPr wrap="square" lIns="27432" rIns="27432" tIns="18288" bIns="18288" anchor="ctr">
+          <a:bodyPr wrap="none" lIns="18288" rIns="18288" tIns="18288" bIns="18288" anchor="t">
             <a:spAutoFit/>
           </a:bodyPr>
           <a:lstStyle/>
@@ -3487,21 +4130,21 @@
                 </a:solidFill>
                 <a:latin typeface="Arial"/>
               </a:rPr>
-              <a:t>• z → axial flight direction</a:t>
-            </a:r>
-          </a:p>
-        </p:txBody>
-      </p:sp>
-      <p:sp>
-        <p:nvSpPr>
-          <p:cNvPr id="13" name="C3-E19 text 11" descr="sci-ppt:o011"/>
+              <a:t>dividing by 2πa:</a:t>
+            </a:r>
+          </a:p>
+        </p:txBody>
+      </p:sp>
+      <p:sp>
+        <p:nvSpPr>
+          <p:cNvPr id="22" name="C3-E19 text 20" descr="sci-ppt:o020"/>
           <p:cNvSpPr txBox="1"/>
           <p:nvPr/>
         </p:nvSpPr>
         <p:spPr>
           <a:xfrm>
-            <a:off x="6217920" y="4096512"/>
-            <a:ext cx="5715000" cy="246888"/>
+            <a:off x="7726679" y="3108960"/>
+            <a:ext cx="4023360" cy="262636"/>
           </a:xfrm>
           <a:prstGeom prst="rect">
             <a:avLst/>
@@ -3510,7 +4153,7 @@
           <a:effectLst/>
         </p:spPr>
         <p:txBody>
-          <a:bodyPr wrap="square" lIns="27432" rIns="27432" tIns="18288" bIns="18288" anchor="ctr">
+          <a:bodyPr wrap="none" lIns="18288" rIns="18288" tIns="18288" bIns="18288" anchor="t">
             <a:spAutoFit/>
           </a:bodyPr>
           <a:lstStyle/>
@@ -3521,27 +4164,27 @@
               </a:spcAft>
             </a:pPr>
             <a:r>
-              <a:rPr sz="1150" b="0" i="0">
+              <a:rPr sz="1400" b="1" i="0">
                 <a:solidFill>
-                  <a:srgbClr val="B4C7D2"/>
+                  <a:srgbClr val="8EDBD4"/>
                 </a:solidFill>
                 <a:latin typeface="Arial"/>
               </a:rPr>
-              <a:t>• Δz fixed finite slice; ξ inside</a:t>
-            </a:r>
-          </a:p>
-        </p:txBody>
-      </p:sp>
-      <p:sp>
-        <p:nvSpPr>
-          <p:cNvPr id="14" name="C3-E19 text 12" descr="sci-ppt:o012"/>
+              <a:t>∂ₜa + v ∂_z a = −(a/2) ∂_z v</a:t>
+            </a:r>
+          </a:p>
+        </p:txBody>
+      </p:sp>
+      <p:sp>
+        <p:nvSpPr>
+          <p:cNvPr id="23" name="C3-E19 text 21" descr="sci-ppt:o021"/>
           <p:cNvSpPr txBox="1"/>
           <p:nvPr/>
         </p:nvSpPr>
         <p:spPr>
           <a:xfrm>
-            <a:off x="320040" y="4329684"/>
-            <a:ext cx="5715000" cy="246888"/>
+            <a:off x="7726679" y="3840480"/>
+            <a:ext cx="4023360" cy="603504"/>
           </a:xfrm>
           <a:prstGeom prst="rect">
             <a:avLst/>
@@ -3550,7 +4193,7 @@
           <a:effectLst/>
         </p:spPr>
         <p:txBody>
-          <a:bodyPr wrap="square" lIns="27432" rIns="27432" tIns="18288" bIns="18288" anchor="ctr">
+          <a:bodyPr wrap="none" lIns="18288" rIns="18288" tIns="18288" bIns="18288" anchor="t">
             <a:spAutoFit/>
           </a:bodyPr>
           <a:lstStyle/>
@@ -3561,27 +4204,59 @@
               </a:spcAft>
             </a:pPr>
             <a:r>
-              <a:rPr sz="1150" b="0" i="0">
+              <a:rPr sz="1200" b="0" i="0">
                 <a:solidFill>
-                  <a:srgbClr val="B4C7D2"/>
+                  <a:srgbClr val="E7F0F3"/>
                 </a:solidFill>
                 <a:latin typeface="Arial"/>
               </a:rPr>
-              <a:t>• a(z,t), A = πa²</a:t>
-            </a:r>
-          </a:p>
-        </p:txBody>
-      </p:sp>
-      <p:sp>
-        <p:nvSpPr>
-          <p:cNvPr id="15" name="C3-E19 text 13" descr="sci-ppt:o013"/>
+              <a:t>If ∂_z v &gt; 0 the right side is negative: the</a:t>
+            </a:r>
+          </a:p>
+          <a:p>
+            <a:pPr algn="l">
+              <a:spcAft>
+                <a:spcPts val="0"/>
+              </a:spcAft>
+            </a:pPr>
+            <a:r>
+              <a:rPr sz="1200" b="0" i="0">
+                <a:solidFill>
+                  <a:srgbClr val="E7F0F3"/>
+                </a:solidFill>
+                <a:latin typeface="Arial"/>
+              </a:rPr>
+              <a:t>radius shrinks even before capillary necking</a:t>
+            </a:r>
+          </a:p>
+          <a:p>
+            <a:pPr algn="l">
+              <a:spcAft>
+                <a:spcPts val="0"/>
+              </a:spcAft>
+            </a:pPr>
+            <a:r>
+              <a:rPr sz="1200" b="0" i="0">
+                <a:solidFill>
+                  <a:srgbClr val="E7F0F3"/>
+                </a:solidFill>
+                <a:latin typeface="Arial"/>
+              </a:rPr>
+              <a:t>grows.</a:t>
+            </a:r>
+          </a:p>
+        </p:txBody>
+      </p:sp>
+      <p:sp>
+        <p:nvSpPr>
+          <p:cNvPr id="24" name="C3-E19 text 22" descr="sci-ppt:o022"/>
           <p:cNvSpPr txBox="1"/>
           <p:nvPr/>
         </p:nvSpPr>
         <p:spPr>
           <a:xfrm>
-            <a:off x="6217920" y="4329684"/>
-            <a:ext cx="5715000" cy="246888"/>
+            <a:off x="320040" y="6510528"/>
+            <a:ext cx="11521440" cy="200660"/>
           </a:xfrm>
           <a:prstGeom prst="rect">
             <a:avLst/>
@@ -3590,207 +4265,7 @@
           <a:effectLst/>
         </p:spPr>
         <p:txBody>
-          <a:bodyPr wrap="square" lIns="27432" rIns="27432" tIns="18288" bIns="18288" anchor="ctr">
-            <a:spAutoFit/>
-          </a:bodyPr>
-          <a:lstStyle/>
-          <a:p>
-            <a:pPr algn="l">
-              <a:spcAft>
-                <a:spcPts val="0"/>
-              </a:spcAft>
-            </a:pPr>
-            <a:r>
-              <a:rPr sz="1150" b="0" i="0">
-                <a:solidFill>
-                  <a:srgbClr val="B4C7D2"/>
-                </a:solidFill>
-                <a:latin typeface="Arial"/>
-              </a:rPr>
-              <a:t>• Av incoming and outgoing flux</a:t>
-            </a:r>
-          </a:p>
-        </p:txBody>
-      </p:sp>
-      <p:sp>
-        <p:nvSpPr>
-          <p:cNvPr id="16" name="C3-E19 text 14" descr="sci-ppt:o014"/>
-          <p:cNvSpPr txBox="1"/>
-          <p:nvPr/>
-        </p:nvSpPr>
-        <p:spPr>
-          <a:xfrm>
-            <a:off x="320040" y="4562856"/>
-            <a:ext cx="5715000" cy="246888"/>
-          </a:xfrm>
-          <a:prstGeom prst="rect">
-            <a:avLst/>
-          </a:prstGeom>
-          <a:noFill/>
-          <a:effectLst/>
-        </p:spPr>
-        <p:txBody>
-          <a:bodyPr wrap="square" lIns="27432" rIns="27432" tIns="18288" bIns="18288" anchor="ctr">
-            <a:spAutoFit/>
-          </a:bodyPr>
-          <a:lstStyle/>
-          <a:p>
-            <a:pPr algn="l">
-              <a:spcAft>
-                <a:spcPts val="0"/>
-              </a:spcAft>
-            </a:pPr>
-            <a:r>
-              <a:rPr sz="1150" b="0" i="0">
-                <a:solidFill>
-                  <a:srgbClr val="B4C7D2"/>
-                </a:solidFill>
-                <a:latin typeface="Arial"/>
-              </a:rPr>
-              <a:t>• v average axial velocity</a:t>
-            </a:r>
-          </a:p>
-        </p:txBody>
-      </p:sp>
-      <p:sp>
-        <p:nvSpPr>
-          <p:cNvPr id="17" name="C3-E19 text 15" descr="sci-ppt:o015"/>
-          <p:cNvSpPr txBox="1"/>
-          <p:nvPr/>
-        </p:nvSpPr>
-        <p:spPr>
-          <a:xfrm>
-            <a:off x="6217920" y="4562856"/>
-            <a:ext cx="5715000" cy="246888"/>
-          </a:xfrm>
-          <a:prstGeom prst="rect">
-            <a:avLst/>
-          </a:prstGeom>
-          <a:noFill/>
-          <a:effectLst/>
-        </p:spPr>
-        <p:txBody>
-          <a:bodyPr wrap="square" lIns="27432" rIns="27432" tIns="18288" bIns="18288" anchor="ctr">
-            <a:spAutoFit/>
-          </a:bodyPr>
-          <a:lstStyle/>
-          <a:p>
-            <a:pPr algn="l">
-              <a:spcAft>
-                <a:spcPts val="0"/>
-              </a:spcAft>
-            </a:pPr>
-            <a:r>
-              <a:rPr sz="1150" b="0" i="0">
-                <a:solidFill>
-                  <a:srgbClr val="B4C7D2"/>
-                </a:solidFill>
-                <a:latin typeface="Arial"/>
-              </a:rPr>
-              <a:t>• ∂ₜ, ∂z, t: evolution legend</a:t>
-            </a:r>
-          </a:p>
-        </p:txBody>
-      </p:sp>
-      <p:sp>
-        <p:nvSpPr>
-          <p:cNvPr id="18" name="C3-E19 text 16" descr="sci-ppt:o016"/>
-          <p:cNvSpPr txBox="1"/>
-          <p:nvPr/>
-        </p:nvSpPr>
-        <p:spPr>
-          <a:xfrm>
-            <a:off x="320040" y="5596128"/>
-            <a:ext cx="11430000" cy="292608"/>
-          </a:xfrm>
-          <a:prstGeom prst="rect">
-            <a:avLst/>
-          </a:prstGeom>
-          <a:noFill/>
-          <a:effectLst/>
-        </p:spPr>
-        <p:txBody>
-          <a:bodyPr wrap="square" lIns="27432" rIns="27432" tIns="18288" bIns="18288" anchor="ctr">
-            <a:spAutoFit/>
-          </a:bodyPr>
-          <a:lstStyle/>
-          <a:p>
-            <a:pPr algn="l">
-              <a:spcAft>
-                <a:spcPts val="0"/>
-              </a:spcAft>
-            </a:pPr>
-            <a:r>
-              <a:rPr sz="1150" b="0" i="0">
-                <a:solidFill>
-                  <a:srgbClr val="8EDBD4"/>
-                </a:solidFill>
-                <a:latin typeface="Arial"/>
-              </a:rPr>
-              <a:t>Positive axial strain thins the jet</a:t>
-            </a:r>
-          </a:p>
-        </p:txBody>
-      </p:sp>
-      <p:sp>
-        <p:nvSpPr>
-          <p:cNvPr id="19" name="C3-E19 text 17" descr="sci-ppt:o017"/>
-          <p:cNvSpPr txBox="1"/>
-          <p:nvPr/>
-        </p:nvSpPr>
-        <p:spPr>
-          <a:xfrm>
-            <a:off x="320040" y="5870448"/>
-            <a:ext cx="11430000" cy="292608"/>
-          </a:xfrm>
-          <a:prstGeom prst="rect">
-            <a:avLst/>
-          </a:prstGeom>
-          <a:noFill/>
-          <a:effectLst/>
-        </p:spPr>
-        <p:txBody>
-          <a:bodyPr wrap="square" lIns="27432" rIns="27432" tIns="18288" bIns="18288" anchor="ctr">
-            <a:spAutoFit/>
-          </a:bodyPr>
-          <a:lstStyle/>
-          <a:p>
-            <a:pPr algn="l">
-              <a:spcAft>
-                <a:spcPts val="0"/>
-              </a:spcAft>
-            </a:pPr>
-            <a:r>
-              <a:rPr sz="1150" b="0" i="0">
-                <a:solidFill>
-                  <a:srgbClr val="8EDBD4"/>
-                </a:solidFill>
-                <a:latin typeface="Arial"/>
-              </a:rPr>
-              <a:t>Initial/end data are required</a:t>
-            </a:r>
-          </a:p>
-        </p:txBody>
-      </p:sp>
-      <p:sp>
-        <p:nvSpPr>
-          <p:cNvPr id="20" name="C3-E19 text 18" descr="sci-ppt:o018"/>
-          <p:cNvSpPr txBox="1"/>
-          <p:nvPr/>
-        </p:nvSpPr>
-        <p:spPr>
-          <a:xfrm>
-            <a:off x="320040" y="6473952"/>
-            <a:ext cx="11430000" cy="256032"/>
-          </a:xfrm>
-          <a:prstGeom prst="rect">
-            <a:avLst/>
-          </a:prstGeom>
-          <a:noFill/>
-          <a:effectLst/>
-        </p:spPr>
-        <p:txBody>
-          <a:bodyPr wrap="square" lIns="27432" rIns="27432" tIns="18288" bIns="18288" anchor="ctr">
+          <a:bodyPr wrap="none" lIns="18288" rIns="18288" tIns="18288" bIns="18288" anchor="t">
             <a:spAutoFit/>
           </a:bodyPr>
           <a:lstStyle/>
@@ -3807,7 +4282,7 @@
                 </a:solidFill>
                 <a:latin typeface="Arial"/>
               </a:rPr>
-              <a:t>Model schematic; geometry is not to scale.</a:t>
+              <a:t>Slender-jet volume conservation of Eq. C3-E19; schematic geometry.</a:t>
             </a:r>
           </a:p>
         </p:txBody>
